--- a/pptx/Malignant_Image_tasks.pptx
+++ b/pptx/Malignant_Image_tasks.pptx
@@ -243,7 +243,7 @@
           <a:p>
             <a:fld id="{F7FB1075-1FC3-4CDC-BCEE-81F9366589A7}" type="datetimeFigureOut">
               <a:rPr lang="zh-CN" altLang="en-US" smtClean="0"/>
-              <a:t>2026/6/14</a:t>
+              <a:t>2026/6/19</a:t>
             </a:fld>
             <a:endParaRPr lang="zh-CN" altLang="en-US"/>
           </a:p>
@@ -413,7 +413,7 @@
           <a:p>
             <a:fld id="{F7FB1075-1FC3-4CDC-BCEE-81F9366589A7}" type="datetimeFigureOut">
               <a:rPr lang="zh-CN" altLang="en-US" smtClean="0"/>
-              <a:t>2026/6/14</a:t>
+              <a:t>2026/6/19</a:t>
             </a:fld>
             <a:endParaRPr lang="zh-CN" altLang="en-US"/>
           </a:p>
@@ -593,7 +593,7 @@
           <a:p>
             <a:fld id="{F7FB1075-1FC3-4CDC-BCEE-81F9366589A7}" type="datetimeFigureOut">
               <a:rPr lang="zh-CN" altLang="en-US" smtClean="0"/>
-              <a:t>2026/6/14</a:t>
+              <a:t>2026/6/19</a:t>
             </a:fld>
             <a:endParaRPr lang="zh-CN" altLang="en-US"/>
           </a:p>
@@ -763,7 +763,7 @@
           <a:p>
             <a:fld id="{F7FB1075-1FC3-4CDC-BCEE-81F9366589A7}" type="datetimeFigureOut">
               <a:rPr lang="zh-CN" altLang="en-US" smtClean="0"/>
-              <a:t>2026/6/14</a:t>
+              <a:t>2026/6/19</a:t>
             </a:fld>
             <a:endParaRPr lang="zh-CN" altLang="en-US"/>
           </a:p>
@@ -1007,7 +1007,7 @@
           <a:p>
             <a:fld id="{F7FB1075-1FC3-4CDC-BCEE-81F9366589A7}" type="datetimeFigureOut">
               <a:rPr lang="zh-CN" altLang="en-US" smtClean="0"/>
-              <a:t>2026/6/14</a:t>
+              <a:t>2026/6/19</a:t>
             </a:fld>
             <a:endParaRPr lang="zh-CN" altLang="en-US"/>
           </a:p>
@@ -1239,7 +1239,7 @@
           <a:p>
             <a:fld id="{F7FB1075-1FC3-4CDC-BCEE-81F9366589A7}" type="datetimeFigureOut">
               <a:rPr lang="zh-CN" altLang="en-US" smtClean="0"/>
-              <a:t>2026/6/14</a:t>
+              <a:t>2026/6/19</a:t>
             </a:fld>
             <a:endParaRPr lang="zh-CN" altLang="en-US"/>
           </a:p>
@@ -1606,7 +1606,7 @@
           <a:p>
             <a:fld id="{F7FB1075-1FC3-4CDC-BCEE-81F9366589A7}" type="datetimeFigureOut">
               <a:rPr lang="zh-CN" altLang="en-US" smtClean="0"/>
-              <a:t>2026/6/14</a:t>
+              <a:t>2026/6/19</a:t>
             </a:fld>
             <a:endParaRPr lang="zh-CN" altLang="en-US"/>
           </a:p>
@@ -1724,7 +1724,7 @@
           <a:p>
             <a:fld id="{F7FB1075-1FC3-4CDC-BCEE-81F9366589A7}" type="datetimeFigureOut">
               <a:rPr lang="zh-CN" altLang="en-US" smtClean="0"/>
-              <a:t>2026/6/14</a:t>
+              <a:t>2026/6/19</a:t>
             </a:fld>
             <a:endParaRPr lang="zh-CN" altLang="en-US"/>
           </a:p>
@@ -1819,7 +1819,7 @@
           <a:p>
             <a:fld id="{F7FB1075-1FC3-4CDC-BCEE-81F9366589A7}" type="datetimeFigureOut">
               <a:rPr lang="zh-CN" altLang="en-US" smtClean="0"/>
-              <a:t>2026/6/14</a:t>
+              <a:t>2026/6/19</a:t>
             </a:fld>
             <a:endParaRPr lang="zh-CN" altLang="en-US"/>
           </a:p>
@@ -2096,7 +2096,7 @@
           <a:p>
             <a:fld id="{F7FB1075-1FC3-4CDC-BCEE-81F9366589A7}" type="datetimeFigureOut">
               <a:rPr lang="zh-CN" altLang="en-US" smtClean="0"/>
-              <a:t>2026/6/14</a:t>
+              <a:t>2026/6/19</a:t>
             </a:fld>
             <a:endParaRPr lang="zh-CN" altLang="en-US"/>
           </a:p>
@@ -2353,7 +2353,7 @@
           <a:p>
             <a:fld id="{F7FB1075-1FC3-4CDC-BCEE-81F9366589A7}" type="datetimeFigureOut">
               <a:rPr lang="zh-CN" altLang="en-US" smtClean="0"/>
-              <a:t>2026/6/14</a:t>
+              <a:t>2026/6/19</a:t>
             </a:fld>
             <a:endParaRPr lang="zh-CN" altLang="en-US"/>
           </a:p>
@@ -2566,7 +2566,7 @@
           <a:p>
             <a:fld id="{F7FB1075-1FC3-4CDC-BCEE-81F9366589A7}" type="datetimeFigureOut">
               <a:rPr lang="zh-CN" altLang="en-US" smtClean="0"/>
-              <a:t>2026/6/14</a:t>
+              <a:t>2026/6/19</a:t>
             </a:fld>
             <a:endParaRPr lang="zh-CN" altLang="en-US"/>
           </a:p>

--- a/pptx/Malignant_Image_tasks.pptx
+++ b/pptx/Malignant_Image_tasks.pptx
@@ -243,7 +243,7 @@
           <a:p>
             <a:fld id="{F7FB1075-1FC3-4CDC-BCEE-81F9366589A7}" type="datetimeFigureOut">
               <a:rPr lang="zh-CN" altLang="en-US" smtClean="0"/>
-              <a:t>2026/6/19</a:t>
+              <a:t>2026/6/27</a:t>
             </a:fld>
             <a:endParaRPr lang="zh-CN" altLang="en-US"/>
           </a:p>
@@ -413,7 +413,7 @@
           <a:p>
             <a:fld id="{F7FB1075-1FC3-4CDC-BCEE-81F9366589A7}" type="datetimeFigureOut">
               <a:rPr lang="zh-CN" altLang="en-US" smtClean="0"/>
-              <a:t>2026/6/19</a:t>
+              <a:t>2026/6/27</a:t>
             </a:fld>
             <a:endParaRPr lang="zh-CN" altLang="en-US"/>
           </a:p>
@@ -593,7 +593,7 @@
           <a:p>
             <a:fld id="{F7FB1075-1FC3-4CDC-BCEE-81F9366589A7}" type="datetimeFigureOut">
               <a:rPr lang="zh-CN" altLang="en-US" smtClean="0"/>
-              <a:t>2026/6/19</a:t>
+              <a:t>2026/6/27</a:t>
             </a:fld>
             <a:endParaRPr lang="zh-CN" altLang="en-US"/>
           </a:p>
@@ -763,7 +763,7 @@
           <a:p>
             <a:fld id="{F7FB1075-1FC3-4CDC-BCEE-81F9366589A7}" type="datetimeFigureOut">
               <a:rPr lang="zh-CN" altLang="en-US" smtClean="0"/>
-              <a:t>2026/6/19</a:t>
+              <a:t>2026/6/27</a:t>
             </a:fld>
             <a:endParaRPr lang="zh-CN" altLang="en-US"/>
           </a:p>
@@ -1007,7 +1007,7 @@
           <a:p>
             <a:fld id="{F7FB1075-1FC3-4CDC-BCEE-81F9366589A7}" type="datetimeFigureOut">
               <a:rPr lang="zh-CN" altLang="en-US" smtClean="0"/>
-              <a:t>2026/6/19</a:t>
+              <a:t>2026/6/27</a:t>
             </a:fld>
             <a:endParaRPr lang="zh-CN" altLang="en-US"/>
           </a:p>
@@ -1239,7 +1239,7 @@
           <a:p>
             <a:fld id="{F7FB1075-1FC3-4CDC-BCEE-81F9366589A7}" type="datetimeFigureOut">
               <a:rPr lang="zh-CN" altLang="en-US" smtClean="0"/>
-              <a:t>2026/6/19</a:t>
+              <a:t>2026/6/27</a:t>
             </a:fld>
             <a:endParaRPr lang="zh-CN" altLang="en-US"/>
           </a:p>
@@ -1606,7 +1606,7 @@
           <a:p>
             <a:fld id="{F7FB1075-1FC3-4CDC-BCEE-81F9366589A7}" type="datetimeFigureOut">
               <a:rPr lang="zh-CN" altLang="en-US" smtClean="0"/>
-              <a:t>2026/6/19</a:t>
+              <a:t>2026/6/27</a:t>
             </a:fld>
             <a:endParaRPr lang="zh-CN" altLang="en-US"/>
           </a:p>
@@ -1724,7 +1724,7 @@
           <a:p>
             <a:fld id="{F7FB1075-1FC3-4CDC-BCEE-81F9366589A7}" type="datetimeFigureOut">
               <a:rPr lang="zh-CN" altLang="en-US" smtClean="0"/>
-              <a:t>2026/6/19</a:t>
+              <a:t>2026/6/27</a:t>
             </a:fld>
             <a:endParaRPr lang="zh-CN" altLang="en-US"/>
           </a:p>
@@ -1819,7 +1819,7 @@
           <a:p>
             <a:fld id="{F7FB1075-1FC3-4CDC-BCEE-81F9366589A7}" type="datetimeFigureOut">
               <a:rPr lang="zh-CN" altLang="en-US" smtClean="0"/>
-              <a:t>2026/6/19</a:t>
+              <a:t>2026/6/27</a:t>
             </a:fld>
             <a:endParaRPr lang="zh-CN" altLang="en-US"/>
           </a:p>
@@ -2096,7 +2096,7 @@
           <a:p>
             <a:fld id="{F7FB1075-1FC3-4CDC-BCEE-81F9366589A7}" type="datetimeFigureOut">
               <a:rPr lang="zh-CN" altLang="en-US" smtClean="0"/>
-              <a:t>2026/6/19</a:t>
+              <a:t>2026/6/27</a:t>
             </a:fld>
             <a:endParaRPr lang="zh-CN" altLang="en-US"/>
           </a:p>
@@ -2353,7 +2353,7 @@
           <a:p>
             <a:fld id="{F7FB1075-1FC3-4CDC-BCEE-81F9366589A7}" type="datetimeFigureOut">
               <a:rPr lang="zh-CN" altLang="en-US" smtClean="0"/>
-              <a:t>2026/6/19</a:t>
+              <a:t>2026/6/27</a:t>
             </a:fld>
             <a:endParaRPr lang="zh-CN" altLang="en-US"/>
           </a:p>
@@ -2566,7 +2566,7 @@
           <a:p>
             <a:fld id="{F7FB1075-1FC3-4CDC-BCEE-81F9366589A7}" type="datetimeFigureOut">
               <a:rPr lang="zh-CN" altLang="en-US" smtClean="0"/>
-              <a:t>2026/6/19</a:t>
+              <a:t>2026/6/27</a:t>
             </a:fld>
             <a:endParaRPr lang="zh-CN" altLang="en-US"/>
           </a:p>
@@ -6338,36 +6338,6 @@
           </a:p>
         </p:txBody>
       </p:sp>
-      <p:pic>
-        <p:nvPicPr>
-          <p:cNvPr id="87" name="图片 86">
-            <a:extLst>
-              <a:ext uri="{FF2B5EF4-FFF2-40B4-BE49-F238E27FC236}">
-                <a16:creationId xmlns:a16="http://schemas.microsoft.com/office/drawing/2014/main" id="{DFCA0156-C990-1ADE-4EB6-077066CE5924}"/>
-              </a:ext>
-            </a:extLst>
-          </p:cNvPr>
-          <p:cNvPicPr>
-            <a:picLocks noChangeAspect="1"/>
-          </p:cNvPicPr>
-          <p:nvPr/>
-        </p:nvPicPr>
-        <p:blipFill>
-          <a:blip r:embed="rId6"/>
-          <a:stretch>
-            <a:fillRect/>
-          </a:stretch>
-        </p:blipFill>
-        <p:spPr>
-          <a:xfrm>
-            <a:off x="830924" y="540623"/>
-            <a:ext cx="720000" cy="731867"/>
-          </a:xfrm>
-          <a:prstGeom prst="rect">
-            <a:avLst/>
-          </a:prstGeom>
-        </p:spPr>
-      </p:pic>
       <p:sp>
         <p:nvSpPr>
           <p:cNvPr id="88" name="对话气泡: 圆角矩形 87">
@@ -6431,7 +6401,6 @@
           </p:cNvPr>
           <p:cNvCxnSpPr>
             <a:cxnSpLocks/>
-            <a:stCxn id="87" idx="2"/>
           </p:cNvCxnSpPr>
           <p:nvPr/>
         </p:nvCxnSpPr>
@@ -6542,7 +6511,7 @@
           <p:nvPr/>
         </p:nvPicPr>
         <p:blipFill>
-          <a:blip r:embed="rId7" cstate="print">
+          <a:blip r:embed="rId6" cstate="print">
             <a:extLst>
               <a:ext uri="{28A0092B-C50C-407E-A947-70E740481C1C}">
                 <a14:useLocalDpi xmlns:a14="http://schemas.microsoft.com/office/drawing/2010/main" val="0"/>
@@ -6751,7 +6720,7 @@
           <p:nvPr/>
         </p:nvPicPr>
         <p:blipFill>
-          <a:blip r:embed="rId8" cstate="print">
+          <a:blip r:embed="rId7" cstate="print">
             <a:extLst>
               <a:ext uri="{28A0092B-C50C-407E-A947-70E740481C1C}">
                 <a14:useLocalDpi xmlns:a14="http://schemas.microsoft.com/office/drawing/2010/main" val="0"/>
@@ -6787,7 +6756,7 @@
           <p:nvPr/>
         </p:nvPicPr>
         <p:blipFill>
-          <a:blip r:embed="rId9" cstate="print">
+          <a:blip r:embed="rId8" cstate="print">
             <a:extLst>
               <a:ext uri="{28A0092B-C50C-407E-A947-70E740481C1C}">
                 <a14:useLocalDpi xmlns:a14="http://schemas.microsoft.com/office/drawing/2010/main" val="0"/>
@@ -7354,7 +7323,7 @@
           <p:nvPr/>
         </p:nvPicPr>
         <p:blipFill>
-          <a:blip r:embed="rId10" cstate="print">
+          <a:blip r:embed="rId9" cstate="print">
             <a:extLst>
               <a:ext uri="{28A0092B-C50C-407E-A947-70E740481C1C}">
                 <a14:useLocalDpi xmlns:a14="http://schemas.microsoft.com/office/drawing/2010/main" val="0"/>
@@ -7536,7 +7505,7 @@
           <p:nvPr/>
         </p:nvPicPr>
         <p:blipFill>
-          <a:blip r:embed="rId11" cstate="print">
+          <a:blip r:embed="rId10" cstate="print">
             <a:extLst>
               <a:ext uri="{28A0092B-C50C-407E-A947-70E740481C1C}">
                 <a14:useLocalDpi xmlns:a14="http://schemas.microsoft.com/office/drawing/2010/main" val="0"/>
@@ -7625,7 +7594,7 @@
           <p:nvPr/>
         </p:nvPicPr>
         <p:blipFill>
-          <a:blip r:embed="rId11" cstate="print">
+          <a:blip r:embed="rId10" cstate="print">
             <a:extLst>
               <a:ext uri="{28A0092B-C50C-407E-A947-70E740481C1C}">
                 <a14:useLocalDpi xmlns:a14="http://schemas.microsoft.com/office/drawing/2010/main" val="0"/>
@@ -7714,7 +7683,7 @@
           <p:nvPr/>
         </p:nvPicPr>
         <p:blipFill>
-          <a:blip r:embed="rId12" cstate="print">
+          <a:blip r:embed="rId11" cstate="print">
             <a:extLst>
               <a:ext uri="{28A0092B-C50C-407E-A947-70E740481C1C}">
                 <a14:useLocalDpi xmlns:a14="http://schemas.microsoft.com/office/drawing/2010/main" val="0"/>
@@ -7803,7 +7772,7 @@
           <p:nvPr/>
         </p:nvPicPr>
         <p:blipFill>
-          <a:blip r:embed="rId13" cstate="print">
+          <a:blip r:embed="rId12" cstate="print">
             <a:extLst>
               <a:ext uri="{28A0092B-C50C-407E-A947-70E740481C1C}">
                 <a14:useLocalDpi xmlns:a14="http://schemas.microsoft.com/office/drawing/2010/main" val="0"/>
@@ -8074,7 +8043,7 @@
           <p:nvPr/>
         </p:nvPicPr>
         <p:blipFill>
-          <a:blip r:embed="rId14" cstate="print">
+          <a:blip r:embed="rId13" cstate="print">
             <a:extLst>
               <a:ext uri="{28A0092B-C50C-407E-A947-70E740481C1C}">
                 <a14:useLocalDpi xmlns:a14="http://schemas.microsoft.com/office/drawing/2010/main" val="0"/>
@@ -8111,7 +8080,7 @@
           <p:nvPr/>
         </p:nvPicPr>
         <p:blipFill>
-          <a:blip r:embed="rId9" cstate="print">
+          <a:blip r:embed="rId8" cstate="print">
             <a:extLst>
               <a:ext uri="{28A0092B-C50C-407E-A947-70E740481C1C}">
                 <a14:useLocalDpi xmlns:a14="http://schemas.microsoft.com/office/drawing/2010/main" val="0"/>
@@ -8151,7 +8120,7 @@
           <a:blip>
             <a:extLst>
               <a:ext uri="{96DAC541-7B7A-43D3-8B79-37D633B846F1}">
-                <asvg:svgBlip xmlns:asvg="http://schemas.microsoft.com/office/drawing/2016/SVG/main" r:embed="rId15"/>
+                <asvg:svgBlip xmlns:asvg="http://schemas.microsoft.com/office/drawing/2016/SVG/main" r:embed="rId14"/>
               </a:ext>
             </a:extLst>
           </a:blip>
@@ -9138,7 +9107,7 @@
           <p:nvPr/>
         </p:nvPicPr>
         <p:blipFill>
-          <a:blip r:embed="rId16">
+          <a:blip r:embed="rId15">
             <a:extLst>
               <a:ext uri="{28A0092B-C50C-407E-A947-70E740481C1C}">
                 <a14:useLocalDpi xmlns:a14="http://schemas.microsoft.com/office/drawing/2010/main" val="0"/>
@@ -9174,7 +9143,7 @@
           <p:nvPr/>
         </p:nvPicPr>
         <p:blipFill>
-          <a:blip r:embed="rId17">
+          <a:blip r:embed="rId16">
             <a:extLst>
               <a:ext uri="{28A0092B-C50C-407E-A947-70E740481C1C}">
                 <a14:useLocalDpi xmlns:a14="http://schemas.microsoft.com/office/drawing/2010/main" val="0"/>
@@ -9287,6 +9256,42 @@
           </a:p>
         </p:txBody>
       </p:sp>
+      <p:pic>
+        <p:nvPicPr>
+          <p:cNvPr id="31" name="图片 30">
+            <a:extLst>
+              <a:ext uri="{FF2B5EF4-FFF2-40B4-BE49-F238E27FC236}">
+                <a16:creationId xmlns:a16="http://schemas.microsoft.com/office/drawing/2014/main" id="{2FCD7845-8014-6AD3-C570-F25CD47030F8}"/>
+              </a:ext>
+            </a:extLst>
+          </p:cNvPr>
+          <p:cNvPicPr>
+            <a:picLocks noChangeAspect="1"/>
+          </p:cNvPicPr>
+          <p:nvPr/>
+        </p:nvPicPr>
+        <p:blipFill>
+          <a:blip r:embed="rId17">
+            <a:extLst>
+              <a:ext uri="{28A0092B-C50C-407E-A947-70E740481C1C}">
+                <a14:useLocalDpi xmlns:a14="http://schemas.microsoft.com/office/drawing/2010/main" val="0"/>
+              </a:ext>
+            </a:extLst>
+          </a:blip>
+          <a:stretch>
+            <a:fillRect/>
+          </a:stretch>
+        </p:blipFill>
+        <p:spPr>
+          <a:xfrm>
+            <a:off x="770800" y="165265"/>
+            <a:ext cx="898941" cy="1058670"/>
+          </a:xfrm>
+          <a:prstGeom prst="rect">
+            <a:avLst/>
+          </a:prstGeom>
+        </p:spPr>
+      </p:pic>
     </p:spTree>
     <p:extLst>
       <p:ext uri="{BB962C8B-B14F-4D97-AF65-F5344CB8AC3E}">
